--- a/outputs/ophthalmology-batch-20261011/flacs/A4_bw_editable.pptx
+++ b/outputs/ophthalmology-batch-20261011/flacs/A4_bw_editable.pptx
@@ -599,7 +599,7 @@
           <a:p/>
           <a:p>
             <a:r>
-              <a:t>flacs-10 角膜切口与散光：透明角膜切口不是必需；可用两/三平面，明显前移或定位困难可改手工。规则散光1.00～1.50 D或散光IOL残余此范围，可考虑松解切口。</a:t>
+              <a:t>flacs-10 角膜切口与散光：透明角膜切口不是必需；可用两/三平面，明显前移或定位困难可改手工。规则散光1.00～1.50 D或散光IOL术后残余散光在此范围，可考虑松解切口。</a:t>
             </a:r>
           </a:p>
           <a:p>
